--- a/Teen_Mental_Health_Presentation.pptx
+++ b/Teen_Mental_Health_Presentation.pptx
@@ -5,15 +5,17 @@
     <p:sldMasterId id="2147483648" r:id="rId1"/>
   </p:sldMasterIdLst>
   <p:sldIdLst>
-    <p:sldId id="256" r:id="rId7"/>
-    <p:sldId id="257" r:id="rId8"/>
-    <p:sldId id="258" r:id="rId9"/>
-    <p:sldId id="259" r:id="rId10"/>
-    <p:sldId id="260" r:id="rId11"/>
-    <p:sldId id="261" r:id="rId12"/>
-    <p:sldId id="262" r:id="rId13"/>
+    <p:sldId id="256" r:id="rId2"/>
+    <p:sldId id="257" r:id="rId3"/>
+    <p:sldId id="258" r:id="rId4"/>
+    <p:sldId id="259" r:id="rId5"/>
+    <p:sldId id="260" r:id="rId6"/>
+    <p:sldId id="261" r:id="rId7"/>
+    <p:sldId id="262" r:id="rId8"/>
+    <p:sldId id="263" r:id="rId9"/>
+    <p:sldId id="264" r:id="rId10"/>
   </p:sldIdLst>
-  <p:sldSz cx="12191695" cy="6858000" type="screen4x3"/>
+  <p:sldSz cx="9144000" cy="6858000" type="screen4x3"/>
   <p:notesSz cx="6858000" cy="9144000"/>
   <p:defaultTextStyle>
     <a:defPPr>
@@ -110,6 +112,22 @@
       </a:defRPr>
     </a:lvl9pPr>
   </p:defaultTextStyle>
+  <p:extLst>
+    <p:ext uri="{EFAFB233-063F-42B5-8137-9DF3F51BA10A}">
+      <p15:sldGuideLst xmlns:p15="http://schemas.microsoft.com/office/powerpoint/2012/main">
+        <p15:guide id="1" orient="horz" pos="2160">
+          <p15:clr>
+            <a:srgbClr val="A4A3A4"/>
+          </p15:clr>
+        </p15:guide>
+        <p15:guide id="2" pos="2880">
+          <p15:clr>
+            <a:srgbClr val="A4A3A4"/>
+          </p15:clr>
+        </p15:guide>
+      </p15:sldGuideLst>
+    </p:ext>
+  </p:extLst>
 </p:presentation>
 </file>
 
@@ -151,10 +169,9 @@
           <a:lstStyle/>
           <a:p>
             <a:r>
-              <a:rPr lang="en-US" smtClean="0"/>
+              <a:rPr lang="en-US"/>
               <a:t>Click to edit Master title style</a:t>
             </a:r>
-            <a:endParaRPr lang="en-US"/>
           </a:p>
         </p:txBody>
       </p:sp>
@@ -270,10 +287,9 @@
           </a:lstStyle>
           <a:p>
             <a:r>
-              <a:rPr lang="en-US" smtClean="0"/>
+              <a:rPr lang="en-US"/>
               <a:t>Click to edit Master subtitle style</a:t>
             </a:r>
-            <a:endParaRPr lang="en-US"/>
           </a:p>
         </p:txBody>
       </p:sp>
@@ -294,7 +310,7 @@
           <a:p>
             <a:fld id="{5BCAD085-E8A6-8845-BD4E-CB4CCA059FC4}" type="datetimeFigureOut">
               <a:rPr lang="en-US" smtClean="0"/>
-              <a:t>1/27/13</a:t>
+              <a:t>07/01/26</a:t>
             </a:fld>
             <a:endParaRPr lang="en-US"/>
           </a:p>
@@ -388,10 +404,9 @@
           <a:lstStyle/>
           <a:p>
             <a:r>
-              <a:rPr lang="en-US" smtClean="0"/>
+              <a:rPr lang="en-US"/>
               <a:t>Click to edit Master title style</a:t>
             </a:r>
-            <a:endParaRPr lang="en-US"/>
           </a:p>
         </p:txBody>
       </p:sp>
@@ -412,38 +427,37 @@
           <a:p>
             <a:pPr lvl="0"/>
             <a:r>
-              <a:rPr lang="en-US" smtClean="0"/>
+              <a:rPr lang="en-US"/>
               <a:t>Click to edit Master text styles</a:t>
             </a:r>
           </a:p>
           <a:p>
             <a:pPr lvl="1"/>
             <a:r>
-              <a:rPr lang="en-US" smtClean="0"/>
+              <a:rPr lang="en-US"/>
               <a:t>Second level</a:t>
             </a:r>
           </a:p>
           <a:p>
             <a:pPr lvl="2"/>
             <a:r>
-              <a:rPr lang="en-US" smtClean="0"/>
+              <a:rPr lang="en-US"/>
               <a:t>Third level</a:t>
             </a:r>
           </a:p>
           <a:p>
             <a:pPr lvl="3"/>
             <a:r>
-              <a:rPr lang="en-US" smtClean="0"/>
+              <a:rPr lang="en-US"/>
               <a:t>Fourth level</a:t>
             </a:r>
           </a:p>
           <a:p>
             <a:pPr lvl="4"/>
             <a:r>
-              <a:rPr lang="en-US" smtClean="0"/>
+              <a:rPr lang="en-US"/>
               <a:t>Fifth level</a:t>
             </a:r>
-            <a:endParaRPr lang="en-US"/>
           </a:p>
         </p:txBody>
       </p:sp>
@@ -464,7 +478,7 @@
           <a:p>
             <a:fld id="{5BCAD085-E8A6-8845-BD4E-CB4CCA059FC4}" type="datetimeFigureOut">
               <a:rPr lang="en-US" smtClean="0"/>
-              <a:t>1/27/13</a:t>
+              <a:t>07/01/26</a:t>
             </a:fld>
             <a:endParaRPr lang="en-US"/>
           </a:p>
@@ -563,10 +577,9 @@
           <a:lstStyle/>
           <a:p>
             <a:r>
-              <a:rPr lang="en-US" smtClean="0"/>
+              <a:rPr lang="en-US"/>
               <a:t>Click to edit Master title style</a:t>
             </a:r>
-            <a:endParaRPr lang="en-US"/>
           </a:p>
         </p:txBody>
       </p:sp>
@@ -592,38 +605,37 @@
           <a:p>
             <a:pPr lvl="0"/>
             <a:r>
-              <a:rPr lang="en-US" smtClean="0"/>
+              <a:rPr lang="en-US"/>
               <a:t>Click to edit Master text styles</a:t>
             </a:r>
           </a:p>
           <a:p>
             <a:pPr lvl="1"/>
             <a:r>
-              <a:rPr lang="en-US" smtClean="0"/>
+              <a:rPr lang="en-US"/>
               <a:t>Second level</a:t>
             </a:r>
           </a:p>
           <a:p>
             <a:pPr lvl="2"/>
             <a:r>
-              <a:rPr lang="en-US" smtClean="0"/>
+              <a:rPr lang="en-US"/>
               <a:t>Third level</a:t>
             </a:r>
           </a:p>
           <a:p>
             <a:pPr lvl="3"/>
             <a:r>
-              <a:rPr lang="en-US" smtClean="0"/>
+              <a:rPr lang="en-US"/>
               <a:t>Fourth level</a:t>
             </a:r>
           </a:p>
           <a:p>
             <a:pPr lvl="4"/>
             <a:r>
-              <a:rPr lang="en-US" smtClean="0"/>
+              <a:rPr lang="en-US"/>
               <a:t>Fifth level</a:t>
             </a:r>
-            <a:endParaRPr lang="en-US"/>
           </a:p>
         </p:txBody>
       </p:sp>
@@ -644,7 +656,7 @@
           <a:p>
             <a:fld id="{5BCAD085-E8A6-8845-BD4E-CB4CCA059FC4}" type="datetimeFigureOut">
               <a:rPr lang="en-US" smtClean="0"/>
-              <a:t>1/27/13</a:t>
+              <a:t>07/01/26</a:t>
             </a:fld>
             <a:endParaRPr lang="en-US"/>
           </a:p>
@@ -738,10 +750,9 @@
           <a:lstStyle/>
           <a:p>
             <a:r>
-              <a:rPr lang="en-US" smtClean="0"/>
+              <a:rPr lang="en-US"/>
               <a:t>Click to edit Master title style</a:t>
             </a:r>
-            <a:endParaRPr lang="en-US"/>
           </a:p>
         </p:txBody>
       </p:sp>
@@ -762,38 +773,37 @@
           <a:p>
             <a:pPr lvl="0"/>
             <a:r>
-              <a:rPr lang="en-US" smtClean="0"/>
+              <a:rPr lang="en-US"/>
               <a:t>Click to edit Master text styles</a:t>
             </a:r>
           </a:p>
           <a:p>
             <a:pPr lvl="1"/>
             <a:r>
-              <a:rPr lang="en-US" smtClean="0"/>
+              <a:rPr lang="en-US"/>
               <a:t>Second level</a:t>
             </a:r>
           </a:p>
           <a:p>
             <a:pPr lvl="2"/>
             <a:r>
-              <a:rPr lang="en-US" smtClean="0"/>
+              <a:rPr lang="en-US"/>
               <a:t>Third level</a:t>
             </a:r>
           </a:p>
           <a:p>
             <a:pPr lvl="3"/>
             <a:r>
-              <a:rPr lang="en-US" smtClean="0"/>
+              <a:rPr lang="en-US"/>
               <a:t>Fourth level</a:t>
             </a:r>
           </a:p>
           <a:p>
             <a:pPr lvl="4"/>
             <a:r>
-              <a:rPr lang="en-US" smtClean="0"/>
+              <a:rPr lang="en-US"/>
               <a:t>Fifth level</a:t>
             </a:r>
-            <a:endParaRPr lang="en-US"/>
           </a:p>
         </p:txBody>
       </p:sp>
@@ -814,7 +824,7 @@
           <a:p>
             <a:fld id="{5BCAD085-E8A6-8845-BD4E-CB4CCA059FC4}" type="datetimeFigureOut">
               <a:rPr lang="en-US" smtClean="0"/>
-              <a:t>1/27/13</a:t>
+              <a:t>07/01/26</a:t>
             </a:fld>
             <a:endParaRPr lang="en-US"/>
           </a:p>
@@ -917,10 +927,9 @@
           </a:lstStyle>
           <a:p>
             <a:r>
-              <a:rPr lang="en-US" smtClean="0"/>
+              <a:rPr lang="en-US"/>
               <a:t>Click to edit Master title style</a:t>
             </a:r>
-            <a:endParaRPr lang="en-US"/>
           </a:p>
         </p:txBody>
       </p:sp>
@@ -1037,7 +1046,7 @@
           <a:p>
             <a:pPr lvl="0"/>
             <a:r>
-              <a:rPr lang="en-US" smtClean="0"/>
+              <a:rPr lang="en-US"/>
               <a:t>Click to edit Master text styles</a:t>
             </a:r>
           </a:p>
@@ -1060,7 +1069,7 @@
           <a:p>
             <a:fld id="{5BCAD085-E8A6-8845-BD4E-CB4CCA059FC4}" type="datetimeFigureOut">
               <a:rPr lang="en-US" smtClean="0"/>
-              <a:t>1/27/13</a:t>
+              <a:t>07/01/26</a:t>
             </a:fld>
             <a:endParaRPr lang="en-US"/>
           </a:p>
@@ -1154,10 +1163,9 @@
           <a:lstStyle/>
           <a:p>
             <a:r>
-              <a:rPr lang="en-US" smtClean="0"/>
+              <a:rPr lang="en-US"/>
               <a:t>Click to edit Master title style</a:t>
             </a:r>
-            <a:endParaRPr lang="en-US"/>
           </a:p>
         </p:txBody>
       </p:sp>
@@ -1211,38 +1219,37 @@
           <a:p>
             <a:pPr lvl="0"/>
             <a:r>
-              <a:rPr lang="en-US" smtClean="0"/>
+              <a:rPr lang="en-US"/>
               <a:t>Click to edit Master text styles</a:t>
             </a:r>
           </a:p>
           <a:p>
             <a:pPr lvl="1"/>
             <a:r>
-              <a:rPr lang="en-US" smtClean="0"/>
+              <a:rPr lang="en-US"/>
               <a:t>Second level</a:t>
             </a:r>
           </a:p>
           <a:p>
             <a:pPr lvl="2"/>
             <a:r>
-              <a:rPr lang="en-US" smtClean="0"/>
+              <a:rPr lang="en-US"/>
               <a:t>Third level</a:t>
             </a:r>
           </a:p>
           <a:p>
             <a:pPr lvl="3"/>
             <a:r>
-              <a:rPr lang="en-US" smtClean="0"/>
+              <a:rPr lang="en-US"/>
               <a:t>Fourth level</a:t>
             </a:r>
           </a:p>
           <a:p>
             <a:pPr lvl="4"/>
             <a:r>
-              <a:rPr lang="en-US" smtClean="0"/>
+              <a:rPr lang="en-US"/>
               <a:t>Fifth level</a:t>
             </a:r>
-            <a:endParaRPr lang="en-US"/>
           </a:p>
         </p:txBody>
       </p:sp>
@@ -1296,38 +1303,37 @@
           <a:p>
             <a:pPr lvl="0"/>
             <a:r>
-              <a:rPr lang="en-US" smtClean="0"/>
+              <a:rPr lang="en-US"/>
               <a:t>Click to edit Master text styles</a:t>
             </a:r>
           </a:p>
           <a:p>
             <a:pPr lvl="1"/>
             <a:r>
-              <a:rPr lang="en-US" smtClean="0"/>
+              <a:rPr lang="en-US"/>
               <a:t>Second level</a:t>
             </a:r>
           </a:p>
           <a:p>
             <a:pPr lvl="2"/>
             <a:r>
-              <a:rPr lang="en-US" smtClean="0"/>
+              <a:rPr lang="en-US"/>
               <a:t>Third level</a:t>
             </a:r>
           </a:p>
           <a:p>
             <a:pPr lvl="3"/>
             <a:r>
-              <a:rPr lang="en-US" smtClean="0"/>
+              <a:rPr lang="en-US"/>
               <a:t>Fourth level</a:t>
             </a:r>
           </a:p>
           <a:p>
             <a:pPr lvl="4"/>
             <a:r>
-              <a:rPr lang="en-US" smtClean="0"/>
+              <a:rPr lang="en-US"/>
               <a:t>Fifth level</a:t>
             </a:r>
-            <a:endParaRPr lang="en-US"/>
           </a:p>
         </p:txBody>
       </p:sp>
@@ -1348,7 +1354,7 @@
           <a:p>
             <a:fld id="{5BCAD085-E8A6-8845-BD4E-CB4CCA059FC4}" type="datetimeFigureOut">
               <a:rPr lang="en-US" smtClean="0"/>
-              <a:t>1/27/13</a:t>
+              <a:t>07/01/26</a:t>
             </a:fld>
             <a:endParaRPr lang="en-US"/>
           </a:p>
@@ -1446,10 +1452,9 @@
           </a:lstStyle>
           <a:p>
             <a:r>
-              <a:rPr lang="en-US" smtClean="0"/>
+              <a:rPr lang="en-US"/>
               <a:t>Click to edit Master title style</a:t>
             </a:r>
-            <a:endParaRPr lang="en-US"/>
           </a:p>
         </p:txBody>
       </p:sp>
@@ -1512,7 +1517,7 @@
           <a:p>
             <a:pPr lvl="0"/>
             <a:r>
-              <a:rPr lang="en-US" smtClean="0"/>
+              <a:rPr lang="en-US"/>
               <a:t>Click to edit Master text styles</a:t>
             </a:r>
           </a:p>
@@ -1568,38 +1573,37 @@
           <a:p>
             <a:pPr lvl="0"/>
             <a:r>
-              <a:rPr lang="en-US" smtClean="0"/>
+              <a:rPr lang="en-US"/>
               <a:t>Click to edit Master text styles</a:t>
             </a:r>
           </a:p>
           <a:p>
             <a:pPr lvl="1"/>
             <a:r>
-              <a:rPr lang="en-US" smtClean="0"/>
+              <a:rPr lang="en-US"/>
               <a:t>Second level</a:t>
             </a:r>
           </a:p>
           <a:p>
             <a:pPr lvl="2"/>
             <a:r>
-              <a:rPr lang="en-US" smtClean="0"/>
+              <a:rPr lang="en-US"/>
               <a:t>Third level</a:t>
             </a:r>
           </a:p>
           <a:p>
             <a:pPr lvl="3"/>
             <a:r>
-              <a:rPr lang="en-US" smtClean="0"/>
+              <a:rPr lang="en-US"/>
               <a:t>Fourth level</a:t>
             </a:r>
           </a:p>
           <a:p>
             <a:pPr lvl="4"/>
             <a:r>
-              <a:rPr lang="en-US" smtClean="0"/>
+              <a:rPr lang="en-US"/>
               <a:t>Fifth level</a:t>
             </a:r>
-            <a:endParaRPr lang="en-US"/>
           </a:p>
         </p:txBody>
       </p:sp>
@@ -1662,7 +1666,7 @@
           <a:p>
             <a:pPr lvl="0"/>
             <a:r>
-              <a:rPr lang="en-US" smtClean="0"/>
+              <a:rPr lang="en-US"/>
               <a:t>Click to edit Master text styles</a:t>
             </a:r>
           </a:p>
@@ -1718,38 +1722,37 @@
           <a:p>
             <a:pPr lvl="0"/>
             <a:r>
-              <a:rPr lang="en-US" smtClean="0"/>
+              <a:rPr lang="en-US"/>
               <a:t>Click to edit Master text styles</a:t>
             </a:r>
           </a:p>
           <a:p>
             <a:pPr lvl="1"/>
             <a:r>
-              <a:rPr lang="en-US" smtClean="0"/>
+              <a:rPr lang="en-US"/>
               <a:t>Second level</a:t>
             </a:r>
           </a:p>
           <a:p>
             <a:pPr lvl="2"/>
             <a:r>
-              <a:rPr lang="en-US" smtClean="0"/>
+              <a:rPr lang="en-US"/>
               <a:t>Third level</a:t>
             </a:r>
           </a:p>
           <a:p>
             <a:pPr lvl="3"/>
             <a:r>
-              <a:rPr lang="en-US" smtClean="0"/>
+              <a:rPr lang="en-US"/>
               <a:t>Fourth level</a:t>
             </a:r>
           </a:p>
           <a:p>
             <a:pPr lvl="4"/>
             <a:r>
-              <a:rPr lang="en-US" smtClean="0"/>
+              <a:rPr lang="en-US"/>
               <a:t>Fifth level</a:t>
             </a:r>
-            <a:endParaRPr lang="en-US"/>
           </a:p>
         </p:txBody>
       </p:sp>
@@ -1770,7 +1773,7 @@
           <a:p>
             <a:fld id="{5BCAD085-E8A6-8845-BD4E-CB4CCA059FC4}" type="datetimeFigureOut">
               <a:rPr lang="en-US" smtClean="0"/>
-              <a:t>1/27/13</a:t>
+              <a:t>07/01/26</a:t>
             </a:fld>
             <a:endParaRPr lang="en-US"/>
           </a:p>
@@ -1864,10 +1867,9 @@
           <a:lstStyle/>
           <a:p>
             <a:r>
-              <a:rPr lang="en-US" smtClean="0"/>
+              <a:rPr lang="en-US"/>
               <a:t>Click to edit Master title style</a:t>
             </a:r>
-            <a:endParaRPr lang="en-US"/>
           </a:p>
         </p:txBody>
       </p:sp>
@@ -1888,7 +1890,7 @@
           <a:p>
             <a:fld id="{5BCAD085-E8A6-8845-BD4E-CB4CCA059FC4}" type="datetimeFigureOut">
               <a:rPr lang="en-US" smtClean="0"/>
-              <a:t>1/27/13</a:t>
+              <a:t>07/01/26</a:t>
             </a:fld>
             <a:endParaRPr lang="en-US"/>
           </a:p>
@@ -1983,7 +1985,7 @@
           <a:p>
             <a:fld id="{5BCAD085-E8A6-8845-BD4E-CB4CCA059FC4}" type="datetimeFigureOut">
               <a:rPr lang="en-US" smtClean="0"/>
-              <a:t>1/27/13</a:t>
+              <a:t>07/01/26</a:t>
             </a:fld>
             <a:endParaRPr lang="en-US"/>
           </a:p>
@@ -2086,10 +2088,9 @@
           </a:lstStyle>
           <a:p>
             <a:r>
-              <a:rPr lang="en-US" smtClean="0"/>
+              <a:rPr lang="en-US"/>
               <a:t>Click to edit Master title style</a:t>
             </a:r>
-            <a:endParaRPr lang="en-US"/>
           </a:p>
         </p:txBody>
       </p:sp>
@@ -2143,38 +2144,37 @@
           <a:p>
             <a:pPr lvl="0"/>
             <a:r>
-              <a:rPr lang="en-US" smtClean="0"/>
+              <a:rPr lang="en-US"/>
               <a:t>Click to edit Master text styles</a:t>
             </a:r>
           </a:p>
           <a:p>
             <a:pPr lvl="1"/>
             <a:r>
-              <a:rPr lang="en-US" smtClean="0"/>
+              <a:rPr lang="en-US"/>
               <a:t>Second level</a:t>
             </a:r>
           </a:p>
           <a:p>
             <a:pPr lvl="2"/>
             <a:r>
-              <a:rPr lang="en-US" smtClean="0"/>
+              <a:rPr lang="en-US"/>
               <a:t>Third level</a:t>
             </a:r>
           </a:p>
           <a:p>
             <a:pPr lvl="3"/>
             <a:r>
-              <a:rPr lang="en-US" smtClean="0"/>
+              <a:rPr lang="en-US"/>
               <a:t>Fourth level</a:t>
             </a:r>
           </a:p>
           <a:p>
             <a:pPr lvl="4"/>
             <a:r>
-              <a:rPr lang="en-US" smtClean="0"/>
+              <a:rPr lang="en-US"/>
               <a:t>Fifth level</a:t>
             </a:r>
-            <a:endParaRPr lang="en-US"/>
           </a:p>
         </p:txBody>
       </p:sp>
@@ -2237,7 +2237,7 @@
           <a:p>
             <a:pPr lvl="0"/>
             <a:r>
-              <a:rPr lang="en-US" smtClean="0"/>
+              <a:rPr lang="en-US"/>
               <a:t>Click to edit Master text styles</a:t>
             </a:r>
           </a:p>
@@ -2260,7 +2260,7 @@
           <a:p>
             <a:fld id="{5BCAD085-E8A6-8845-BD4E-CB4CCA059FC4}" type="datetimeFigureOut">
               <a:rPr lang="en-US" smtClean="0"/>
-              <a:t>1/27/13</a:t>
+              <a:t>07/01/26</a:t>
             </a:fld>
             <a:endParaRPr lang="en-US"/>
           </a:p>
@@ -2363,10 +2363,9 @@
           </a:lstStyle>
           <a:p>
             <a:r>
-              <a:rPr lang="en-US" smtClean="0"/>
+              <a:rPr lang="en-US"/>
               <a:t>Click to edit Master title style</a:t>
             </a:r>
-            <a:endParaRPr lang="en-US"/>
           </a:p>
         </p:txBody>
       </p:sp>
@@ -2490,7 +2489,7 @@
           <a:p>
             <a:pPr lvl="0"/>
             <a:r>
-              <a:rPr lang="en-US" smtClean="0"/>
+              <a:rPr lang="en-US"/>
               <a:t>Click to edit Master text styles</a:t>
             </a:r>
           </a:p>
@@ -2513,7 +2512,7 @@
           <a:p>
             <a:fld id="{5BCAD085-E8A6-8845-BD4E-CB4CCA059FC4}" type="datetimeFigureOut">
               <a:rPr lang="en-US" smtClean="0"/>
-              <a:t>1/27/13</a:t>
+              <a:t>07/01/26</a:t>
             </a:fld>
             <a:endParaRPr lang="en-US"/>
           </a:p>
@@ -2622,10 +2621,9 @@
           <a:lstStyle/>
           <a:p>
             <a:r>
-              <a:rPr lang="en-US" smtClean="0"/>
+              <a:rPr lang="en-US"/>
               <a:t>Click to edit Master title style</a:t>
             </a:r>
-            <a:endParaRPr lang="en-US"/>
           </a:p>
         </p:txBody>
       </p:sp>
@@ -2656,38 +2654,37 @@
           <a:p>
             <a:pPr lvl="0"/>
             <a:r>
-              <a:rPr lang="en-US" smtClean="0"/>
+              <a:rPr lang="en-US"/>
               <a:t>Click to edit Master text styles</a:t>
             </a:r>
           </a:p>
           <a:p>
             <a:pPr lvl="1"/>
             <a:r>
-              <a:rPr lang="en-US" smtClean="0"/>
+              <a:rPr lang="en-US"/>
               <a:t>Second level</a:t>
             </a:r>
           </a:p>
           <a:p>
             <a:pPr lvl="2"/>
             <a:r>
-              <a:rPr lang="en-US" smtClean="0"/>
+              <a:rPr lang="en-US"/>
               <a:t>Third level</a:t>
             </a:r>
           </a:p>
           <a:p>
             <a:pPr lvl="3"/>
             <a:r>
-              <a:rPr lang="en-US" smtClean="0"/>
+              <a:rPr lang="en-US"/>
               <a:t>Fourth level</a:t>
             </a:r>
           </a:p>
           <a:p>
             <a:pPr lvl="4"/>
             <a:r>
-              <a:rPr lang="en-US" smtClean="0"/>
+              <a:rPr lang="en-US"/>
               <a:t>Fifth level</a:t>
             </a:r>
-            <a:endParaRPr lang="en-US"/>
           </a:p>
         </p:txBody>
       </p:sp>
@@ -2726,7 +2723,7 @@
           <a:p>
             <a:fld id="{5BCAD085-E8A6-8845-BD4E-CB4CCA059FC4}" type="datetimeFigureOut">
               <a:rPr lang="en-US" smtClean="0"/>
-              <a:t>1/27/13</a:t>
+              <a:t>07/01/26</a:t>
             </a:fld>
             <a:endParaRPr lang="en-US"/>
           </a:p>
@@ -3085,7 +3082,7 @@
 </file>
 
 <file path=ppt/slides/slide1.xml><?xml version="1.0" encoding="utf-8"?>
-<p:sld xmlns:a="http://schemas.openxmlformats.org/drawingml/2006/main" xmlns:p="http://schemas.openxmlformats.org/presentationml/2006/main" xmlns:r="http://schemas.openxmlformats.org/officeDocument/2006/relationships">
+<p:sld xmlns:a="http://schemas.openxmlformats.org/drawingml/2006/main" xmlns:r="http://schemas.openxmlformats.org/officeDocument/2006/relationships" xmlns:p="http://schemas.openxmlformats.org/presentationml/2006/main">
   <p:cSld>
     <p:spTree>
       <p:nvGrpSpPr>
@@ -3093,73 +3090,52 @@
         <p:cNvGrpSpPr/>
         <p:nvPr/>
       </p:nvGrpSpPr>
-      <p:grpSpPr/>
-      <p:sp>
-        <p:nvSpPr>
-          <p:cNvPr id="2" name="TextBox 1"/>
-          <p:cNvSpPr txBox="1"/>
-          <p:nvPr/>
-        </p:nvSpPr>
-        <p:spPr>
-          <a:xfrm>
-            <a:off x="548640" y="320040"/>
-            <a:ext cx="10972800" cy="548640"/>
-          </a:xfrm>
-          <a:prstGeom prst="rect">
-            <a:avLst/>
-          </a:prstGeom>
-          <a:noFill/>
-        </p:spPr>
-        <p:txBody>
-          <a:bodyPr wrap="none">
-            <a:spAutoFit/>
-          </a:bodyPr>
-          <a:lstStyle/>
-          <a:p>
-            <a:pPr>
-              <a:defRPr sz="3000" b="1"/>
-            </a:pPr>
-            <a:r>
-              <a:t>Teen Mental Health Analysis</a:t>
-            </a:r>
-          </a:p>
-        </p:txBody>
-      </p:sp>
-      <p:sp>
-        <p:nvSpPr>
-          <p:cNvPr id="3" name="TextBox 2"/>
-          <p:cNvSpPr txBox="1"/>
-          <p:nvPr/>
-        </p:nvSpPr>
-        <p:spPr>
-          <a:xfrm>
-            <a:off x="731520" y="1005840"/>
-            <a:ext cx="10607040" cy="5303520"/>
-          </a:xfrm>
-          <a:prstGeom prst="rect">
-            <a:avLst/>
-          </a:prstGeom>
-          <a:noFill/>
-        </p:spPr>
-        <p:txBody>
-          <a:bodyPr wrap="none">
-            <a:spAutoFit/>
-          </a:bodyPr>
-          <a:lstStyle/>
-          <a:p>
-            <a:pPr>
-              <a:defRPr sz="2100"/>
-            </a:pPr>
-            <a:r>
-              <a:t>Excel Dashboard Presentation</a:t>
-            </a:r>
-          </a:p>
-          <a:p>
-            <a:pPr>
-              <a:defRPr sz="2100"/>
-            </a:pPr>
-            <a:r>
-              <a:t>Prepared using Data Cleaning, Pivot Tables &amp; Dashboard</a:t>
+      <p:grpSpPr>
+        <a:xfrm>
+          <a:off x="0" y="0"/>
+          <a:ext cx="0" cy="0"/>
+          <a:chOff x="0" y="0"/>
+          <a:chExt cx="0" cy="0"/>
+        </a:xfrm>
+      </p:grpSpPr>
+      <p:sp>
+        <p:nvSpPr>
+          <p:cNvPr id="2" name="Title 1"/>
+          <p:cNvSpPr>
+            <a:spLocks noGrp="1"/>
+          </p:cNvSpPr>
+          <p:nvPr>
+            <p:ph type="title"/>
+          </p:nvPr>
+        </p:nvSpPr>
+        <p:spPr/>
+        <p:txBody>
+          <a:bodyPr/>
+          <a:lstStyle/>
+          <a:p>
+            <a:r>
+              <a:t>Social Media Influence on Teens</a:t>
+            </a:r>
+          </a:p>
+        </p:txBody>
+      </p:sp>
+      <p:sp>
+        <p:nvSpPr>
+          <p:cNvPr id="3" name="Content Placeholder 2"/>
+          <p:cNvSpPr>
+            <a:spLocks noGrp="1"/>
+          </p:cNvSpPr>
+          <p:nvPr>
+            <p:ph idx="1"/>
+          </p:nvPr>
+        </p:nvSpPr>
+        <p:spPr/>
+        <p:txBody>
+          <a:bodyPr/>
+          <a:lstStyle/>
+          <a:p>
+            <a:r>
+              <a:t>Data Analytics Presentation</a:t>
             </a:r>
           </a:p>
         </p:txBody>
@@ -3173,7 +3149,7 @@
 </file>
 
 <file path=ppt/slides/slide2.xml><?xml version="1.0" encoding="utf-8"?>
-<p:sld xmlns:a="http://schemas.openxmlformats.org/drawingml/2006/main" xmlns:p="http://schemas.openxmlformats.org/presentationml/2006/main" xmlns:r="http://schemas.openxmlformats.org/officeDocument/2006/relationships">
+<p:sld xmlns:a="http://schemas.openxmlformats.org/drawingml/2006/main" xmlns:r="http://schemas.openxmlformats.org/officeDocument/2006/relationships" xmlns:p="http://schemas.openxmlformats.org/presentationml/2006/main">
   <p:cSld>
     <p:spTree>
       <p:nvGrpSpPr>
@@ -3181,136 +3157,59 @@
         <p:cNvGrpSpPr/>
         <p:nvPr/>
       </p:nvGrpSpPr>
-      <p:grpSpPr/>
-      <p:sp>
-        <p:nvSpPr>
-          <p:cNvPr id="2" name="TextBox 1"/>
-          <p:cNvSpPr txBox="1"/>
-          <p:nvPr/>
-        </p:nvSpPr>
-        <p:spPr>
-          <a:xfrm>
-            <a:off x="548640" y="320040"/>
-            <a:ext cx="10972800" cy="548640"/>
-          </a:xfrm>
-          <a:prstGeom prst="rect">
-            <a:avLst/>
-          </a:prstGeom>
-          <a:noFill/>
-        </p:spPr>
-        <p:txBody>
-          <a:bodyPr wrap="none">
-            <a:spAutoFit/>
+      <p:grpSpPr>
+        <a:xfrm>
+          <a:off x="0" y="0"/>
+          <a:ext cx="0" cy="0"/>
+          <a:chOff x="0" y="0"/>
+          <a:chExt cx="0" cy="0"/>
+        </a:xfrm>
+      </p:grpSpPr>
+      <p:sp>
+        <p:nvSpPr>
+          <p:cNvPr id="2" name="Title 1"/>
+          <p:cNvSpPr>
+            <a:spLocks noGrp="1"/>
+          </p:cNvSpPr>
+          <p:nvPr>
+            <p:ph type="title"/>
+          </p:nvPr>
+        </p:nvSpPr>
+        <p:spPr/>
+        <p:txBody>
+          <a:bodyPr>
+            <a:normAutofit fontScale="90000"/>
           </a:bodyPr>
           <a:lstStyle/>
           <a:p>
-            <a:pPr>
-              <a:defRPr sz="3000" b="1"/>
-            </a:pPr>
-            <a:r>
-              <a:t>STAR Model</a:t>
-            </a:r>
-          </a:p>
-        </p:txBody>
-      </p:sp>
-      <p:sp>
-        <p:nvSpPr>
-          <p:cNvPr id="3" name="TextBox 2"/>
-          <p:cNvSpPr txBox="1"/>
-          <p:nvPr/>
-        </p:nvSpPr>
-        <p:spPr>
-          <a:xfrm>
-            <a:off x="731520" y="1005840"/>
-            <a:ext cx="10607040" cy="5303520"/>
-          </a:xfrm>
-          <a:prstGeom prst="rect">
-            <a:avLst/>
-          </a:prstGeom>
-          <a:noFill/>
-        </p:spPr>
-        <p:txBody>
-          <a:bodyPr wrap="none">
-            <a:spAutoFit/>
-          </a:bodyPr>
-          <a:lstStyle/>
-          <a:p>
-            <a:pPr>
-              <a:defRPr sz="2100"/>
-            </a:pPr>
-            <a:r>
+            <a:r>
+              <a:rPr dirty="0"/>
               <a:t>Situation</a:t>
             </a:r>
-          </a:p>
-          <a:p>
-            <a:pPr>
-              <a:defRPr sz="2100"/>
-            </a:pPr>
-            <a:r>
-              <a:t>Teen mental health is an increasing concern.</a:t>
-            </a:r>
-          </a:p>
-          <a:p>
-            <a:pPr>
-              <a:defRPr sz="2100"/>
-            </a:pPr>
-          </a:p>
-          <a:p>
-            <a:pPr>
-              <a:defRPr sz="2100"/>
-            </a:pPr>
-            <a:r>
-              <a:t>Task</a:t>
-            </a:r>
-          </a:p>
-          <a:p>
-            <a:pPr>
-              <a:defRPr sz="2100"/>
-            </a:pPr>
-            <a:r>
-              <a:t>Clean the dataset and uncover meaningful insights.</a:t>
-            </a:r>
-          </a:p>
-          <a:p>
-            <a:pPr>
-              <a:defRPr sz="2100"/>
-            </a:pPr>
-          </a:p>
-          <a:p>
-            <a:pPr>
-              <a:defRPr sz="2100"/>
-            </a:pPr>
-            <a:r>
-              <a:t>Action</a:t>
-            </a:r>
-          </a:p>
-          <a:p>
-            <a:pPr>
-              <a:defRPr sz="2100"/>
-            </a:pPr>
-            <a:r>
-              <a:t>Performed data cleaning, created Pivot Tables and built an interactive dashboard.</a:t>
-            </a:r>
-          </a:p>
-          <a:p>
-            <a:pPr>
-              <a:defRPr sz="2100"/>
-            </a:pPr>
-          </a:p>
-          <a:p>
-            <a:pPr>
-              <a:defRPr sz="2100"/>
-            </a:pPr>
-            <a:r>
-              <a:t>Result</a:t>
-            </a:r>
-          </a:p>
-          <a:p>
-            <a:pPr>
-              <a:defRPr sz="2100"/>
-            </a:pPr>
-            <a:r>
-              <a:t>Generated insights that support decision-making.</a:t>
+            <a:br>
+              <a:rPr lang="en-US" dirty="0"/>
+            </a:br>
+            <a:endParaRPr dirty="0"/>
+          </a:p>
+        </p:txBody>
+      </p:sp>
+      <p:sp>
+        <p:nvSpPr>
+          <p:cNvPr id="3" name="Content Placeholder 2"/>
+          <p:cNvSpPr>
+            <a:spLocks noGrp="1"/>
+          </p:cNvSpPr>
+          <p:nvPr>
+            <p:ph idx="1"/>
+          </p:nvPr>
+        </p:nvSpPr>
+        <p:spPr/>
+        <p:txBody>
+          <a:bodyPr/>
+          <a:lstStyle/>
+          <a:p>
+            <a:r>
+              <a:t>Teenagers spend significant time on social media, raising concerns about sleep, stress, anxiety, addiction, and overall mental well-being.</a:t>
             </a:r>
           </a:p>
         </p:txBody>
@@ -3324,7 +3223,7 @@
 </file>
 
 <file path=ppt/slides/slide3.xml><?xml version="1.0" encoding="utf-8"?>
-<p:sld xmlns:a="http://schemas.openxmlformats.org/drawingml/2006/main" xmlns:p="http://schemas.openxmlformats.org/presentationml/2006/main" xmlns:r="http://schemas.openxmlformats.org/officeDocument/2006/relationships">
+<p:sld xmlns:a="http://schemas.openxmlformats.org/drawingml/2006/main" xmlns:r="http://schemas.openxmlformats.org/officeDocument/2006/relationships" xmlns:p="http://schemas.openxmlformats.org/presentationml/2006/main">
   <p:cSld>
     <p:spTree>
       <p:nvGrpSpPr>
@@ -3332,89 +3231,59 @@
         <p:cNvGrpSpPr/>
         <p:nvPr/>
       </p:nvGrpSpPr>
-      <p:grpSpPr/>
-      <p:sp>
-        <p:nvSpPr>
-          <p:cNvPr id="2" name="TextBox 1"/>
-          <p:cNvSpPr txBox="1"/>
-          <p:nvPr/>
-        </p:nvSpPr>
-        <p:spPr>
-          <a:xfrm>
-            <a:off x="548640" y="320040"/>
-            <a:ext cx="10972800" cy="548640"/>
-          </a:xfrm>
-          <a:prstGeom prst="rect">
-            <a:avLst/>
-          </a:prstGeom>
-          <a:noFill/>
-        </p:spPr>
-        <p:txBody>
-          <a:bodyPr wrap="none">
-            <a:spAutoFit/>
+      <p:grpSpPr>
+        <a:xfrm>
+          <a:off x="0" y="0"/>
+          <a:ext cx="0" cy="0"/>
+          <a:chOff x="0" y="0"/>
+          <a:chExt cx="0" cy="0"/>
+        </a:xfrm>
+      </p:grpSpPr>
+      <p:sp>
+        <p:nvSpPr>
+          <p:cNvPr id="2" name="Title 1"/>
+          <p:cNvSpPr>
+            <a:spLocks noGrp="1"/>
+          </p:cNvSpPr>
+          <p:nvPr>
+            <p:ph type="title"/>
+          </p:nvPr>
+        </p:nvSpPr>
+        <p:spPr/>
+        <p:txBody>
+          <a:bodyPr>
+            <a:normAutofit fontScale="90000"/>
           </a:bodyPr>
           <a:lstStyle/>
           <a:p>
-            <a:pPr>
-              <a:defRPr sz="3000" b="1"/>
-            </a:pPr>
-            <a:r>
-              <a:t>Introduction</a:t>
-            </a:r>
-          </a:p>
-        </p:txBody>
-      </p:sp>
-      <p:sp>
-        <p:nvSpPr>
-          <p:cNvPr id="3" name="TextBox 2"/>
-          <p:cNvSpPr txBox="1"/>
-          <p:nvPr/>
-        </p:nvSpPr>
-        <p:spPr>
-          <a:xfrm>
-            <a:off x="731520" y="1005840"/>
-            <a:ext cx="10607040" cy="5303520"/>
-          </a:xfrm>
-          <a:prstGeom prst="rect">
-            <a:avLst/>
-          </a:prstGeom>
-          <a:noFill/>
-        </p:spPr>
-        <p:txBody>
-          <a:bodyPr wrap="none">
-            <a:spAutoFit/>
-          </a:bodyPr>
-          <a:lstStyle/>
-          <a:p>
-            <a:pPr>
-              <a:defRPr sz="2100"/>
-            </a:pPr>
-            <a:r>
-              <a:t>• Original dataset was cleaned.</a:t>
-            </a:r>
-          </a:p>
-          <a:p>
-            <a:pPr>
-              <a:defRPr sz="2100"/>
-            </a:pPr>
-            <a:r>
-              <a:t>• Pivot Tables summarized key trends.</a:t>
-            </a:r>
-          </a:p>
-          <a:p>
-            <a:pPr>
-              <a:defRPr sz="2100"/>
-            </a:pPr>
-            <a:r>
-              <a:t>• Dashboard enables interactive analysis.</a:t>
-            </a:r>
-          </a:p>
-          <a:p>
-            <a:pPr>
-              <a:defRPr sz="2100"/>
-            </a:pPr>
-            <a:r>
-              <a:t>• Objective: Identify factors affecting teen mental health.</a:t>
+            <a:r>
+              <a:rPr dirty="0"/>
+              <a:t>Task</a:t>
+            </a:r>
+            <a:br>
+              <a:rPr lang="en-US" dirty="0"/>
+            </a:br>
+            <a:endParaRPr dirty="0"/>
+          </a:p>
+        </p:txBody>
+      </p:sp>
+      <p:sp>
+        <p:nvSpPr>
+          <p:cNvPr id="3" name="Content Placeholder 2"/>
+          <p:cNvSpPr>
+            <a:spLocks noGrp="1"/>
+          </p:cNvSpPr>
+          <p:nvPr>
+            <p:ph idx="1"/>
+          </p:nvPr>
+        </p:nvSpPr>
+        <p:spPr/>
+        <p:txBody>
+          <a:bodyPr/>
+          <a:lstStyle/>
+          <a:p>
+            <a:r>
+              <a:t>Analyze the dataset to identify patterns between social media usage and mental health indicators and provide actionable recommendations.</a:t>
             </a:r>
           </a:p>
         </p:txBody>
@@ -3428,7 +3297,7 @@
 </file>
 
 <file path=ppt/slides/slide4.xml><?xml version="1.0" encoding="utf-8"?>
-<p:sld xmlns:a="http://schemas.openxmlformats.org/drawingml/2006/main" xmlns:p="http://schemas.openxmlformats.org/presentationml/2006/main" xmlns:r="http://schemas.openxmlformats.org/officeDocument/2006/relationships">
+<p:sld xmlns:a="http://schemas.openxmlformats.org/drawingml/2006/main" xmlns:r="http://schemas.openxmlformats.org/officeDocument/2006/relationships" xmlns:p="http://schemas.openxmlformats.org/presentationml/2006/main">
   <p:cSld>
     <p:spTree>
       <p:nvGrpSpPr>
@@ -3436,89 +3305,84 @@
         <p:cNvGrpSpPr/>
         <p:nvPr/>
       </p:nvGrpSpPr>
-      <p:grpSpPr/>
-      <p:sp>
-        <p:nvSpPr>
-          <p:cNvPr id="2" name="TextBox 1"/>
-          <p:cNvSpPr txBox="1"/>
-          <p:nvPr/>
-        </p:nvSpPr>
-        <p:spPr>
-          <a:xfrm>
-            <a:off x="548640" y="320040"/>
-            <a:ext cx="10972800" cy="548640"/>
-          </a:xfrm>
-          <a:prstGeom prst="rect">
-            <a:avLst/>
-          </a:prstGeom>
-          <a:noFill/>
-        </p:spPr>
-        <p:txBody>
-          <a:bodyPr wrap="none">
-            <a:spAutoFit/>
-          </a:bodyPr>
-          <a:lstStyle/>
-          <a:p>
-            <a:pPr>
-              <a:defRPr sz="3000" b="1"/>
+      <p:grpSpPr>
+        <a:xfrm>
+          <a:off x="0" y="0"/>
+          <a:ext cx="0" cy="0"/>
+          <a:chOff x="0" y="0"/>
+          <a:chExt cx="0" cy="0"/>
+        </a:xfrm>
+      </p:grpSpPr>
+      <p:sp>
+        <p:nvSpPr>
+          <p:cNvPr id="2" name="Title 1"/>
+          <p:cNvSpPr>
+            <a:spLocks noGrp="1"/>
+          </p:cNvSpPr>
+          <p:nvPr>
+            <p:ph type="title"/>
+          </p:nvPr>
+        </p:nvSpPr>
+        <p:spPr/>
+        <p:txBody>
+          <a:bodyPr/>
+          <a:lstStyle/>
+          <a:p>
+            <a:r>
+              <a:rPr dirty="0"/>
+              <a:t>Action: Analytics Performed</a:t>
+            </a:r>
+          </a:p>
+        </p:txBody>
+      </p:sp>
+      <p:sp>
+        <p:nvSpPr>
+          <p:cNvPr id="3" name="Content Placeholder 2"/>
+          <p:cNvSpPr>
+            <a:spLocks noGrp="1"/>
+          </p:cNvSpPr>
+          <p:nvPr>
+            <p:ph idx="1"/>
+          </p:nvPr>
+        </p:nvSpPr>
+        <p:spPr/>
+        <p:txBody>
+          <a:bodyPr/>
+          <a:lstStyle/>
+          <a:p>
+            <a:pPr marL="0" indent="0">
+              <a:buNone/>
             </a:pPr>
             <a:r>
-              <a:t>Analysis Questions</a:t>
-            </a:r>
-          </a:p>
-        </p:txBody>
-      </p:sp>
-      <p:sp>
-        <p:nvSpPr>
-          <p:cNvPr id="3" name="TextBox 2"/>
-          <p:cNvSpPr txBox="1"/>
-          <p:nvPr/>
-        </p:nvSpPr>
-        <p:spPr>
-          <a:xfrm>
-            <a:off x="731520" y="1005840"/>
-            <a:ext cx="10607040" cy="5303520"/>
-          </a:xfrm>
-          <a:prstGeom prst="rect">
-            <a:avLst/>
-          </a:prstGeom>
-          <a:noFill/>
-        </p:spPr>
-        <p:txBody>
-          <a:bodyPr wrap="none">
-            <a:spAutoFit/>
-          </a:bodyPr>
-          <a:lstStyle/>
-          <a:p>
-            <a:pPr>
-              <a:defRPr sz="2100"/>
+              <a:rPr dirty="0"/>
+              <a:t>• Cleaned and explored the dataset</a:t>
+            </a:r>
+          </a:p>
+          <a:p>
+            <a:pPr marL="0" indent="0">
+              <a:buNone/>
             </a:pPr>
             <a:r>
-              <a:t>• Which groups are most affected?</a:t>
-            </a:r>
-          </a:p>
-          <a:p>
-            <a:pPr>
-              <a:defRPr sz="2100"/>
+              <a:rPr dirty="0"/>
+              <a:t>• Examined social media usage, sleep, stress, anxiety, and addiction indicators</a:t>
+            </a:r>
+          </a:p>
+          <a:p>
+            <a:pPr marL="0" indent="0">
+              <a:buNone/>
             </a:pPr>
             <a:r>
-              <a:t>• Which lifestyle factors influence mental health?</a:t>
-            </a:r>
-          </a:p>
-          <a:p>
-            <a:pPr>
-              <a:defRPr sz="2100"/>
+              <a:rPr dirty="0"/>
+              <a:t>• Compared mental distress patterns and platform usage</a:t>
+            </a:r>
+          </a:p>
+          <a:p>
+            <a:pPr marL="0" indent="0">
+              <a:buNone/>
             </a:pPr>
             <a:r>
-              <a:t>• What patterns emerge from the dashboard?</a:t>
-            </a:r>
-          </a:p>
-          <a:p>
-            <a:pPr>
-              <a:defRPr sz="2100"/>
-            </a:pPr>
-            <a:r>
-              <a:t>• What recommendations can be made?</a:t>
+              <a:rPr dirty="0"/>
+              <a:t>• Summarized insights for decision-making</a:t>
             </a:r>
           </a:p>
         </p:txBody>
@@ -3532,7 +3396,7 @@
 </file>
 
 <file path=ppt/slides/slide5.xml><?xml version="1.0" encoding="utf-8"?>
-<p:sld xmlns:a="http://schemas.openxmlformats.org/drawingml/2006/main" xmlns:p="http://schemas.openxmlformats.org/presentationml/2006/main" xmlns:r="http://schemas.openxmlformats.org/officeDocument/2006/relationships">
+<p:sld xmlns:a="http://schemas.openxmlformats.org/drawingml/2006/main" xmlns:r="http://schemas.openxmlformats.org/officeDocument/2006/relationships" xmlns:p="http://schemas.openxmlformats.org/presentationml/2006/main">
   <p:cSld>
     <p:spTree>
       <p:nvGrpSpPr>
@@ -3540,89 +3404,94 @@
         <p:cNvGrpSpPr/>
         <p:nvPr/>
       </p:nvGrpSpPr>
-      <p:grpSpPr/>
-      <p:sp>
-        <p:nvSpPr>
-          <p:cNvPr id="2" name="TextBox 1"/>
-          <p:cNvSpPr txBox="1"/>
-          <p:nvPr/>
-        </p:nvSpPr>
-        <p:spPr>
-          <a:xfrm>
-            <a:off x="548640" y="320040"/>
-            <a:ext cx="10972800" cy="548640"/>
-          </a:xfrm>
-          <a:prstGeom prst="rect">
-            <a:avLst/>
-          </a:prstGeom>
-          <a:noFill/>
-        </p:spPr>
-        <p:txBody>
-          <a:bodyPr wrap="none">
-            <a:spAutoFit/>
-          </a:bodyPr>
-          <a:lstStyle/>
-          <a:p>
-            <a:pPr>
-              <a:defRPr sz="3000" b="1"/>
+      <p:grpSpPr>
+        <a:xfrm>
+          <a:off x="0" y="0"/>
+          <a:ext cx="0" cy="0"/>
+          <a:chOff x="0" y="0"/>
+          <a:chExt cx="0" cy="0"/>
+        </a:xfrm>
+      </p:grpSpPr>
+      <p:sp>
+        <p:nvSpPr>
+          <p:cNvPr id="2" name="Title 1"/>
+          <p:cNvSpPr>
+            <a:spLocks noGrp="1"/>
+          </p:cNvSpPr>
+          <p:nvPr>
+            <p:ph type="title"/>
+          </p:nvPr>
+        </p:nvSpPr>
+        <p:spPr/>
+        <p:txBody>
+          <a:bodyPr/>
+          <a:lstStyle/>
+          <a:p>
+            <a:r>
+              <a:rPr dirty="0"/>
+              <a:t>Results: Key Findings</a:t>
+            </a:r>
+          </a:p>
+        </p:txBody>
+      </p:sp>
+      <p:sp>
+        <p:nvSpPr>
+          <p:cNvPr id="3" name="Content Placeholder 2"/>
+          <p:cNvSpPr>
+            <a:spLocks noGrp="1"/>
+          </p:cNvSpPr>
+          <p:nvPr>
+            <p:ph idx="1"/>
+          </p:nvPr>
+        </p:nvSpPr>
+        <p:spPr/>
+        <p:txBody>
+          <a:bodyPr/>
+          <a:lstStyle/>
+          <a:p>
+            <a:pPr marL="0" indent="0">
+              <a:buNone/>
             </a:pPr>
             <a:r>
-              <a:t>Findings</a:t>
-            </a:r>
-          </a:p>
-        </p:txBody>
-      </p:sp>
-      <p:sp>
-        <p:nvSpPr>
-          <p:cNvPr id="3" name="TextBox 2"/>
-          <p:cNvSpPr txBox="1"/>
-          <p:nvPr/>
-        </p:nvSpPr>
-        <p:spPr>
-          <a:xfrm>
-            <a:off x="731520" y="1005840"/>
-            <a:ext cx="10607040" cy="5303520"/>
-          </a:xfrm>
-          <a:prstGeom prst="rect">
-            <a:avLst/>
-          </a:prstGeom>
-          <a:noFill/>
-        </p:spPr>
-        <p:txBody>
-          <a:bodyPr wrap="none">
-            <a:spAutoFit/>
-          </a:bodyPr>
-          <a:lstStyle/>
-          <a:p>
-            <a:pPr>
-              <a:defRPr sz="2100"/>
+              <a:rPr dirty="0"/>
+              <a:t>• Average social media usage: 4.5 hours/day</a:t>
+            </a:r>
+          </a:p>
+          <a:p>
+            <a:pPr marL="0" indent="0">
+              <a:buNone/>
             </a:pPr>
             <a:r>
-              <a:t>• Data quality improved after cleaning.</a:t>
-            </a:r>
-          </a:p>
-          <a:p>
-            <a:pPr>
-              <a:defRPr sz="2100"/>
+              <a:rPr dirty="0"/>
+              <a:t>• Average sleep: 6.4 hours/day</a:t>
+            </a:r>
+            <a:endParaRPr lang="en-US" dirty="0"/>
+          </a:p>
+          <a:p>
+            <a:pPr marL="0" indent="0">
+              <a:buNone/>
             </a:pPr>
             <a:r>
-              <a:t>• Pivot tables summarized important trends.</a:t>
-            </a:r>
-          </a:p>
-          <a:p>
-            <a:pPr>
-              <a:defRPr sz="2100"/>
+              <a:rPr lang="en-US" dirty="0"/>
+              <a:t>• Average stress level: 5.4</a:t>
+            </a:r>
+          </a:p>
+          <a:p>
+            <a:pPr marL="0" indent="0">
+              <a:buNone/>
             </a:pPr>
             <a:r>
-              <a:t>• Dashboard visualized key metrics.</a:t>
-            </a:r>
-          </a:p>
-          <a:p>
-            <a:pPr>
-              <a:defRPr sz="2100"/>
+              <a:rPr dirty="0"/>
+              <a:t>• Average anxiety level: 5.6</a:t>
+            </a:r>
+          </a:p>
+          <a:p>
+            <a:pPr marL="0" indent="0">
+              <a:buNone/>
             </a:pPr>
             <a:r>
-              <a:t>• Interactive filters improved analysis.</a:t>
+              <a:rPr dirty="0"/>
+              <a:t>• Heavy social media exposure is associated with mental distress indicators in the dataset.</a:t>
             </a:r>
           </a:p>
         </p:txBody>
@@ -3636,7 +3505,7 @@
 </file>
 
 <file path=ppt/slides/slide6.xml><?xml version="1.0" encoding="utf-8"?>
-<p:sld xmlns:a="http://schemas.openxmlformats.org/drawingml/2006/main" xmlns:p="http://schemas.openxmlformats.org/presentationml/2006/main" xmlns:r="http://schemas.openxmlformats.org/officeDocument/2006/relationships">
+<p:sld xmlns:a="http://schemas.openxmlformats.org/drawingml/2006/main" xmlns:r="http://schemas.openxmlformats.org/officeDocument/2006/relationships" xmlns:p="http://schemas.openxmlformats.org/presentationml/2006/main">
   <p:cSld>
     <p:spTree>
       <p:nvGrpSpPr>
@@ -3644,89 +3513,62 @@
         <p:cNvGrpSpPr/>
         <p:nvPr/>
       </p:nvGrpSpPr>
-      <p:grpSpPr/>
-      <p:sp>
-        <p:nvSpPr>
-          <p:cNvPr id="2" name="TextBox 1"/>
-          <p:cNvSpPr txBox="1"/>
-          <p:nvPr/>
-        </p:nvSpPr>
-        <p:spPr>
-          <a:xfrm>
-            <a:off x="548640" y="320040"/>
-            <a:ext cx="10972800" cy="548640"/>
-          </a:xfrm>
-          <a:prstGeom prst="rect">
-            <a:avLst/>
-          </a:prstGeom>
-          <a:noFill/>
-        </p:spPr>
-        <p:txBody>
-          <a:bodyPr wrap="none">
-            <a:spAutoFit/>
-          </a:bodyPr>
-          <a:lstStyle/>
-          <a:p>
-            <a:pPr>
-              <a:defRPr sz="3000" b="1"/>
-            </a:pPr>
-            <a:r>
-              <a:t>Insights &amp; Recommendations</a:t>
-            </a:r>
-          </a:p>
-        </p:txBody>
-      </p:sp>
-      <p:sp>
-        <p:nvSpPr>
-          <p:cNvPr id="3" name="TextBox 2"/>
-          <p:cNvSpPr txBox="1"/>
-          <p:nvPr/>
-        </p:nvSpPr>
-        <p:spPr>
-          <a:xfrm>
-            <a:off x="731520" y="1005840"/>
-            <a:ext cx="10607040" cy="5303520"/>
-          </a:xfrm>
-          <a:prstGeom prst="rect">
-            <a:avLst/>
-          </a:prstGeom>
-          <a:noFill/>
-        </p:spPr>
-        <p:txBody>
-          <a:bodyPr wrap="none">
-            <a:spAutoFit/>
-          </a:bodyPr>
-          <a:lstStyle/>
-          <a:p>
-            <a:pPr>
-              <a:defRPr sz="2100"/>
-            </a:pPr>
-            <a:r>
-              <a:t>• Encourage healthy sleep habits.</a:t>
-            </a:r>
-          </a:p>
-          <a:p>
-            <a:pPr>
-              <a:defRPr sz="2100"/>
-            </a:pPr>
-            <a:r>
-              <a:t>• Promote responsible social media usage.</a:t>
-            </a:r>
-          </a:p>
-          <a:p>
-            <a:pPr>
-              <a:defRPr sz="2100"/>
-            </a:pPr>
-            <a:r>
-              <a:t>• Support high-risk groups.</a:t>
-            </a:r>
-          </a:p>
-          <a:p>
-            <a:pPr>
-              <a:defRPr sz="2100"/>
-            </a:pPr>
-            <a:r>
-              <a:t>• Continue monitoring with dashboards.</a:t>
+      <p:grpSpPr>
+        <a:xfrm>
+          <a:off x="0" y="0"/>
+          <a:ext cx="0" cy="0"/>
+          <a:chOff x="0" y="0"/>
+          <a:chExt cx="0" cy="0"/>
+        </a:xfrm>
+      </p:grpSpPr>
+      <p:sp>
+        <p:nvSpPr>
+          <p:cNvPr id="2" name="Title 1"/>
+          <p:cNvSpPr>
+            <a:spLocks noGrp="1"/>
+          </p:cNvSpPr>
+          <p:nvPr>
+            <p:ph type="title"/>
+          </p:nvPr>
+        </p:nvSpPr>
+        <p:spPr/>
+        <p:txBody>
+          <a:bodyPr/>
+          <a:lstStyle/>
+          <a:p>
+            <a:r>
+              <a:t>Mental Health Distribution</a:t>
+            </a:r>
+          </a:p>
+        </p:txBody>
+      </p:sp>
+      <p:sp>
+        <p:nvSpPr>
+          <p:cNvPr id="3" name="Content Placeholder 2"/>
+          <p:cNvSpPr>
+            <a:spLocks noGrp="1"/>
+          </p:cNvSpPr>
+          <p:nvPr>
+            <p:ph idx="1"/>
+          </p:nvPr>
+        </p:nvSpPr>
+        <p:spPr/>
+        <p:txBody>
+          <a:bodyPr/>
+          <a:lstStyle/>
+          <a:p>
+            <a:r>
+              <a:t>Mentally Strained: 741</a:t>
+            </a:r>
+          </a:p>
+          <a:p>
+            <a:r>
+              <a:t>Mentally Unstable: 355</a:t>
+            </a:r>
+          </a:p>
+          <a:p>
+            <a:r>
+              <a:t>Mentally Sound: 104</a:t>
             </a:r>
           </a:p>
         </p:txBody>
@@ -3740,7 +3582,7 @@
 </file>
 
 <file path=ppt/slides/slide7.xml><?xml version="1.0" encoding="utf-8"?>
-<p:sld xmlns:a="http://schemas.openxmlformats.org/drawingml/2006/main" xmlns:p="http://schemas.openxmlformats.org/presentationml/2006/main" xmlns:r="http://schemas.openxmlformats.org/officeDocument/2006/relationships">
+<p:sld xmlns:a="http://schemas.openxmlformats.org/drawingml/2006/main" xmlns:r="http://schemas.openxmlformats.org/officeDocument/2006/relationships" xmlns:p="http://schemas.openxmlformats.org/presentationml/2006/main">
   <p:cSld>
     <p:spTree>
       <p:nvGrpSpPr>
@@ -3748,65 +3590,240 @@
         <p:cNvGrpSpPr/>
         <p:nvPr/>
       </p:nvGrpSpPr>
-      <p:grpSpPr/>
-      <p:sp>
-        <p:nvSpPr>
-          <p:cNvPr id="2" name="TextBox 1"/>
-          <p:cNvSpPr txBox="1"/>
-          <p:nvPr/>
-        </p:nvSpPr>
-        <p:spPr>
-          <a:xfrm>
-            <a:off x="548640" y="320040"/>
-            <a:ext cx="10972800" cy="548640"/>
-          </a:xfrm>
-          <a:prstGeom prst="rect">
-            <a:avLst/>
-          </a:prstGeom>
-          <a:noFill/>
-        </p:spPr>
-        <p:txBody>
-          <a:bodyPr wrap="none">
-            <a:spAutoFit/>
-          </a:bodyPr>
-          <a:lstStyle/>
-          <a:p>
-            <a:pPr>
-              <a:defRPr sz="3000" b="1"/>
+      <p:grpSpPr>
+        <a:xfrm>
+          <a:off x="0" y="0"/>
+          <a:ext cx="0" cy="0"/>
+          <a:chOff x="0" y="0"/>
+          <a:chExt cx="0" cy="0"/>
+        </a:xfrm>
+      </p:grpSpPr>
+      <p:sp>
+        <p:nvSpPr>
+          <p:cNvPr id="2" name="Title 1"/>
+          <p:cNvSpPr>
+            <a:spLocks noGrp="1"/>
+          </p:cNvSpPr>
+          <p:nvPr>
+            <p:ph type="title"/>
+          </p:nvPr>
+        </p:nvSpPr>
+        <p:spPr/>
+        <p:txBody>
+          <a:bodyPr/>
+          <a:lstStyle/>
+          <a:p>
+            <a:r>
+              <a:t>Platform Usage Insights</a:t>
+            </a:r>
+          </a:p>
+        </p:txBody>
+      </p:sp>
+      <p:sp>
+        <p:nvSpPr>
+          <p:cNvPr id="3" name="Content Placeholder 2"/>
+          <p:cNvSpPr>
+            <a:spLocks noGrp="1"/>
+          </p:cNvSpPr>
+          <p:nvPr>
+            <p:ph idx="1"/>
+          </p:nvPr>
+        </p:nvSpPr>
+        <p:spPr/>
+        <p:txBody>
+          <a:bodyPr/>
+          <a:lstStyle/>
+          <a:p>
+            <a:r>
+              <a:t>Instagram, TikTok, and combined platform usage dominate the dataset.</a:t>
+            </a:r>
+          </a:p>
+          <a:p>
+            <a:r>
+              <a:t>High engagement across multiple platforms may increase screen exposure and reduce recovery time.</a:t>
+            </a:r>
+          </a:p>
+        </p:txBody>
+      </p:sp>
+    </p:spTree>
+  </p:cSld>
+  <p:clrMapOvr>
+    <a:masterClrMapping/>
+  </p:clrMapOvr>
+</p:sld>
+</file>
+
+<file path=ppt/slides/slide8.xml><?xml version="1.0" encoding="utf-8"?>
+<p:sld xmlns:a="http://schemas.openxmlformats.org/drawingml/2006/main" xmlns:r="http://schemas.openxmlformats.org/officeDocument/2006/relationships" xmlns:p="http://schemas.openxmlformats.org/presentationml/2006/main">
+  <p:cSld>
+    <p:spTree>
+      <p:nvGrpSpPr>
+        <p:cNvPr id="1" name=""/>
+        <p:cNvGrpSpPr/>
+        <p:nvPr/>
+      </p:nvGrpSpPr>
+      <p:grpSpPr>
+        <a:xfrm>
+          <a:off x="0" y="0"/>
+          <a:ext cx="0" cy="0"/>
+          <a:chOff x="0" y="0"/>
+          <a:chExt cx="0" cy="0"/>
+        </a:xfrm>
+      </p:grpSpPr>
+      <p:sp>
+        <p:nvSpPr>
+          <p:cNvPr id="2" name="Title 1"/>
+          <p:cNvSpPr>
+            <a:spLocks noGrp="1"/>
+          </p:cNvSpPr>
+          <p:nvPr>
+            <p:ph type="title"/>
+          </p:nvPr>
+        </p:nvSpPr>
+        <p:spPr/>
+        <p:txBody>
+          <a:bodyPr/>
+          <a:lstStyle/>
+          <a:p>
+            <a:r>
+              <a:t>Recommendations for Teen Mental Health</a:t>
+            </a:r>
+          </a:p>
+        </p:txBody>
+      </p:sp>
+      <p:sp>
+        <p:nvSpPr>
+          <p:cNvPr id="3" name="Content Placeholder 2"/>
+          <p:cNvSpPr>
+            <a:spLocks noGrp="1"/>
+          </p:cNvSpPr>
+          <p:nvPr>
+            <p:ph idx="1"/>
+          </p:nvPr>
+        </p:nvSpPr>
+        <p:spPr/>
+        <p:txBody>
+          <a:bodyPr/>
+          <a:lstStyle/>
+          <a:p>
+            <a:pPr marL="0" indent="0">
+              <a:buNone/>
             </a:pPr>
             <a:r>
-              <a:t>Thank You</a:t>
-            </a:r>
-          </a:p>
-        </p:txBody>
-      </p:sp>
-      <p:sp>
-        <p:nvSpPr>
-          <p:cNvPr id="3" name="TextBox 2"/>
-          <p:cNvSpPr txBox="1"/>
-          <p:nvPr/>
-        </p:nvSpPr>
-        <p:spPr>
-          <a:xfrm>
-            <a:off x="731520" y="1005840"/>
-            <a:ext cx="10607040" cy="5303520"/>
-          </a:xfrm>
-          <a:prstGeom prst="rect">
-            <a:avLst/>
-          </a:prstGeom>
-          <a:noFill/>
-        </p:spPr>
-        <p:txBody>
-          <a:bodyPr wrap="none">
-            <a:spAutoFit/>
-          </a:bodyPr>
-          <a:lstStyle/>
-          <a:p>
-            <a:pPr>
-              <a:defRPr sz="2100"/>
+              <a:rPr dirty="0"/>
+              <a:t>• Set daily screen-time limits</a:t>
+            </a:r>
+          </a:p>
+          <a:p>
+            <a:pPr marL="0" indent="0">
+              <a:buNone/>
             </a:pPr>
             <a:r>
-              <a:t>Questions &amp; Answers</a:t>
+              <a:rPr dirty="0"/>
+              <a:t>• Avoid screens at least 1 hour before sleep</a:t>
+            </a:r>
+          </a:p>
+          <a:p>
+            <a:pPr marL="0" indent="0">
+              <a:buNone/>
+            </a:pPr>
+            <a:r>
+              <a:rPr dirty="0"/>
+              <a:t>• Engage in physical activities regularly</a:t>
+            </a:r>
+          </a:p>
+          <a:p>
+            <a:pPr marL="0" indent="0">
+              <a:buNone/>
+            </a:pPr>
+            <a:r>
+              <a:rPr dirty="0"/>
+              <a:t>• Maintain healthy social interactions offline</a:t>
+            </a:r>
+          </a:p>
+          <a:p>
+            <a:pPr marL="0" indent="0">
+              <a:buNone/>
+            </a:pPr>
+            <a:r>
+              <a:rPr dirty="0"/>
+              <a:t>• Practice stress-management techniques</a:t>
+            </a:r>
+          </a:p>
+          <a:p>
+            <a:pPr marL="0" indent="0">
+              <a:buNone/>
+            </a:pPr>
+            <a:r>
+              <a:rPr dirty="0"/>
+              <a:t>• Seek support from parents, teachers, or counselors when needed</a:t>
+            </a:r>
+          </a:p>
+        </p:txBody>
+      </p:sp>
+    </p:spTree>
+  </p:cSld>
+  <p:clrMapOvr>
+    <a:masterClrMapping/>
+  </p:clrMapOvr>
+</p:sld>
+</file>
+
+<file path=ppt/slides/slide9.xml><?xml version="1.0" encoding="utf-8"?>
+<p:sld xmlns:a="http://schemas.openxmlformats.org/drawingml/2006/main" xmlns:r="http://schemas.openxmlformats.org/officeDocument/2006/relationships" xmlns:p="http://schemas.openxmlformats.org/presentationml/2006/main">
+  <p:cSld>
+    <p:spTree>
+      <p:nvGrpSpPr>
+        <p:cNvPr id="1" name=""/>
+        <p:cNvGrpSpPr/>
+        <p:nvPr/>
+      </p:nvGrpSpPr>
+      <p:grpSpPr>
+        <a:xfrm>
+          <a:off x="0" y="0"/>
+          <a:ext cx="0" cy="0"/>
+          <a:chOff x="0" y="0"/>
+          <a:chExt cx="0" cy="0"/>
+        </a:xfrm>
+      </p:grpSpPr>
+      <p:sp>
+        <p:nvSpPr>
+          <p:cNvPr id="2" name="Title 1"/>
+          <p:cNvSpPr>
+            <a:spLocks noGrp="1"/>
+          </p:cNvSpPr>
+          <p:nvPr>
+            <p:ph type="title"/>
+          </p:nvPr>
+        </p:nvSpPr>
+        <p:spPr/>
+        <p:txBody>
+          <a:bodyPr/>
+          <a:lstStyle/>
+          <a:p>
+            <a:r>
+              <a:t>Conclusion</a:t>
+            </a:r>
+          </a:p>
+        </p:txBody>
+      </p:sp>
+      <p:sp>
+        <p:nvSpPr>
+          <p:cNvPr id="3" name="Content Placeholder 2"/>
+          <p:cNvSpPr>
+            <a:spLocks noGrp="1"/>
+          </p:cNvSpPr>
+          <p:nvPr>
+            <p:ph idx="1"/>
+          </p:nvPr>
+        </p:nvSpPr>
+        <p:spPr/>
+        <p:txBody>
+          <a:bodyPr/>
+          <a:lstStyle/>
+          <a:p>
+            <a:r>
+              <a:t>Social media offers benefits, but excessive use may contribute to stress, anxiety, poor sleep, and mental strain. Balanced usage and healthy habits can help teens protect their mental well-being.</a:t>
             </a:r>
           </a:p>
         </p:txBody>
